--- a/weekly_presentations/week06_vol_surface.pptx
+++ b/weekly_presentations/week06_vol_surface.pptx
@@ -17,6 +17,7 @@
     <p:sldId id="265" r:id="rId16"/>
     <p:sldId id="266" r:id="rId17"/>
     <p:sldId id="267" r:id="rId18"/>
+    <p:sldId id="268" r:id="rId19"/>
   </p:sldIdLst>
   <p:sldSz cx="12191695" cy="6858000" type="screen4x3"/>
   <p:notesSz cx="6858000" cy="9144000"/>
@@ -3304,7 +3305,7 @@
           <a:noFill/>
         </p:spPr>
         <p:txBody>
-          <a:bodyPr wrap="none">
+          <a:bodyPr wrap="square">
             <a:spAutoFit/>
           </a:bodyPr>
           <a:lstStyle/>
@@ -3316,7 +3317,7 @@
                 </a:solidFill>
                 <a:latin typeface="Arial"/>
               </a:rPr>
-              <a:t>Glossary — Key Terms</a:t>
+              <a:t>Summary — Key Takeaways</a:t>
             </a:r>
           </a:p>
         </p:txBody>
@@ -3388,176 +3389,81 @@
           <a:p>
             <a:pPr>
               <a:spcAft>
-                <a:spcPts val="700"/>
+                <a:spcPts val="800"/>
               </a:spcAft>
             </a:pPr>
             <a:r>
-              <a:rPr sz="1500" b="1" i="0">
-                <a:solidFill>
-                  <a:srgbClr val="CC0000"/>
-                </a:solidFill>
-                <a:latin typeface="Arial"/>
-              </a:rPr>
-              <a:t>Implied volatility — </a:t>
-            </a:r>
-            <a:r>
-              <a:rPr sz="1500" b="0" i="0">
+              <a:rPr sz="1700" b="0" i="0">
                 <a:solidFill>
                   <a:srgbClr val="1A1A1A"/>
                 </a:solidFill>
                 <a:latin typeface="Arial"/>
               </a:rPr>
-              <a:t>the volatility that matches the market option price under Black-Scholes</a:t>
+              <a:t>•  Implied volatility forms a smile; SVI and SABR parameterize it</a:t>
             </a:r>
           </a:p>
           <a:p>
             <a:pPr>
               <a:spcAft>
-                <a:spcPts val="700"/>
+                <a:spcPts val="800"/>
               </a:spcAft>
             </a:pPr>
             <a:r>
-              <a:rPr sz="1500" b="1" i="0">
-                <a:solidFill>
-                  <a:srgbClr val="CC0000"/>
-                </a:solidFill>
-                <a:latin typeface="Arial"/>
-              </a:rPr>
-              <a:t>Volatility smile — </a:t>
-            </a:r>
-            <a:r>
-              <a:rPr sz="1500" b="0" i="0">
+              <a:rPr sz="1700" b="0" i="0">
                 <a:solidFill>
                   <a:srgbClr val="1A1A1A"/>
                 </a:solidFill>
                 <a:latin typeface="Arial"/>
               </a:rPr>
-              <a:t>implied volatility as a function of strike / moneyness</a:t>
+              <a:t>•  Fit with PyTorch autograd Jacobians -- no hand-derived gradients</a:t>
             </a:r>
           </a:p>
           <a:p>
             <a:pPr>
               <a:spcAft>
-                <a:spcPts val="700"/>
+                <a:spcPts val="800"/>
               </a:spcAft>
             </a:pPr>
             <a:r>
-              <a:rPr sz="1500" b="1" i="0">
-                <a:solidFill>
-                  <a:srgbClr val="CC0000"/>
-                </a:solidFill>
-                <a:latin typeface="Arial"/>
-              </a:rPr>
-              <a:t>SVI — </a:t>
-            </a:r>
-            <a:r>
-              <a:rPr sz="1500" b="0" i="0">
+              <a:rPr sz="1700" b="0" i="0">
                 <a:solidFill>
                   <a:srgbClr val="1A1A1A"/>
                 </a:solidFill>
                 <a:latin typeface="Arial"/>
               </a:rPr>
-              <a:t>Stochastic Volatility Inspired parameterization of total variance</a:t>
+              <a:t>•  Enforce calendar and butterfly no-arbitrage so the surface is tradeable</a:t>
             </a:r>
           </a:p>
           <a:p>
             <a:pPr>
               <a:spcAft>
-                <a:spcPts val="700"/>
+                <a:spcPts val="800"/>
               </a:spcAft>
             </a:pPr>
             <a:r>
-              <a:rPr sz="1500" b="1" i="0">
-                <a:solidFill>
-                  <a:srgbClr val="CC0000"/>
-                </a:solidFill>
-                <a:latin typeface="Arial"/>
-              </a:rPr>
-              <a:t>SABR — </a:t>
-            </a:r>
-            <a:r>
-              <a:rPr sz="1500" b="0" i="0">
+              <a:rPr sz="1700" b="0" i="0">
                 <a:solidFill>
                   <a:srgbClr val="1A1A1A"/>
                 </a:solidFill>
                 <a:latin typeface="Arial"/>
               </a:rPr>
-              <a:t>stochastic alpha-beta-rho model with the Hagan implied-vol expansion</a:t>
+              <a:t>•  Greeks (incl. vanna, volga) come straight from autograd</a:t>
             </a:r>
           </a:p>
           <a:p>
             <a:pPr>
               <a:spcAft>
-                <a:spcPts val="700"/>
+                <a:spcPts val="800"/>
               </a:spcAft>
             </a:pPr>
             <a:r>
-              <a:rPr sz="1500" b="1" i="0">
-                <a:solidFill>
-                  <a:srgbClr val="CC0000"/>
-                </a:solidFill>
-                <a:latin typeface="Arial"/>
-              </a:rPr>
-              <a:t>Greeks — </a:t>
-            </a:r>
-            <a:r>
-              <a:rPr sz="1500" b="0" i="0">
+              <a:rPr sz="1700" b="0" i="0">
                 <a:solidFill>
                   <a:srgbClr val="1A1A1A"/>
                 </a:solidFill>
                 <a:latin typeface="Arial"/>
               </a:rPr>
-              <a:t>price sensitivities: delta, gamma, vega, theta, rho</a:t>
-            </a:r>
-          </a:p>
-          <a:p>
-            <a:pPr>
-              <a:spcAft>
-                <a:spcPts val="700"/>
-              </a:spcAft>
-            </a:pPr>
-            <a:r>
-              <a:rPr sz="1500" b="1" i="0">
-                <a:solidFill>
-                  <a:srgbClr val="CC0000"/>
-                </a:solidFill>
-                <a:latin typeface="Arial"/>
-              </a:rPr>
-              <a:t>Vanna / Volga — </a:t>
-            </a:r>
-            <a:r>
-              <a:rPr sz="1500" b="0" i="0">
-                <a:solidFill>
-                  <a:srgbClr val="1A1A1A"/>
-                </a:solidFill>
-                <a:latin typeface="Arial"/>
-              </a:rPr>
-              <a:t>second-order Greeks: d vega / dS and d vega / d sigma</a:t>
-            </a:r>
-          </a:p>
-          <a:p>
-            <a:pPr>
-              <a:spcAft>
-                <a:spcPts val="700"/>
-              </a:spcAft>
-            </a:pPr>
-            <a:r>
-              <a:rPr sz="1500" b="1" i="0">
-                <a:solidFill>
-                  <a:srgbClr val="CC0000"/>
-                </a:solidFill>
-                <a:latin typeface="Arial"/>
-              </a:rPr>
-              <a:t>Calendar / butterfly arbitrage — </a:t>
-            </a:r>
-            <a:r>
-              <a:rPr sz="1500" b="0" i="0">
-                <a:solidFill>
-                  <a:srgbClr val="1A1A1A"/>
-                </a:solidFill>
-                <a:latin typeface="Arial"/>
-              </a:rPr>
-              <a:t>no-arbitrage constraints the surface must satisfy</a:t>
+              <a:t>•  Crypto data is noisy: weight by volume/spread and seed from yesterday's fit</a:t>
             </a:r>
           </a:p>
         </p:txBody>
@@ -3621,7 +3527,7 @@
           <a:noFill/>
         </p:spPr>
         <p:txBody>
-          <a:bodyPr wrap="square">
+          <a:bodyPr wrap="none">
             <a:spAutoFit/>
           </a:bodyPr>
           <a:lstStyle/>
@@ -3633,7 +3539,7 @@
                 </a:solidFill>
                 <a:latin typeface="Arial"/>
               </a:rPr>
-              <a:t>Reading</a:t>
+              <a:t>Glossary — Key Terms</a:t>
             </a:r>
           </a:p>
         </p:txBody>
@@ -3705,17 +3611,176 @@
           <a:p>
             <a:pPr>
               <a:spcAft>
-                <a:spcPts val="800"/>
+                <a:spcPts val="700"/>
               </a:spcAft>
             </a:pPr>
             <a:r>
-              <a:rPr sz="1700" b="0" i="0">
+              <a:rPr sz="1500" b="1" i="0">
+                <a:solidFill>
+                  <a:srgbClr val="CC0000"/>
+                </a:solidFill>
+                <a:latin typeface="Arial"/>
+              </a:rPr>
+              <a:t>Implied volatility — </a:t>
+            </a:r>
+            <a:r>
+              <a:rPr sz="1500" b="0" i="0">
                 <a:solidFill>
                   <a:srgbClr val="1A1A1A"/>
                 </a:solidFill>
                 <a:latin typeface="Arial"/>
               </a:rPr>
-              <a:t>•  Gatheral (2006), Ch. 1-5; Gatheral-Jacquier (2014); Hagan et al. (2002)</a:t>
+              <a:t>the volatility that matches the market option price under Black-Scholes</a:t>
+            </a:r>
+          </a:p>
+          <a:p>
+            <a:pPr>
+              <a:spcAft>
+                <a:spcPts val="700"/>
+              </a:spcAft>
+            </a:pPr>
+            <a:r>
+              <a:rPr sz="1500" b="1" i="0">
+                <a:solidFill>
+                  <a:srgbClr val="CC0000"/>
+                </a:solidFill>
+                <a:latin typeface="Arial"/>
+              </a:rPr>
+              <a:t>Volatility smile — </a:t>
+            </a:r>
+            <a:r>
+              <a:rPr sz="1500" b="0" i="0">
+                <a:solidFill>
+                  <a:srgbClr val="1A1A1A"/>
+                </a:solidFill>
+                <a:latin typeface="Arial"/>
+              </a:rPr>
+              <a:t>implied volatility as a function of strike / moneyness</a:t>
+            </a:r>
+          </a:p>
+          <a:p>
+            <a:pPr>
+              <a:spcAft>
+                <a:spcPts val="700"/>
+              </a:spcAft>
+            </a:pPr>
+            <a:r>
+              <a:rPr sz="1500" b="1" i="0">
+                <a:solidFill>
+                  <a:srgbClr val="CC0000"/>
+                </a:solidFill>
+                <a:latin typeface="Arial"/>
+              </a:rPr>
+              <a:t>SVI — </a:t>
+            </a:r>
+            <a:r>
+              <a:rPr sz="1500" b="0" i="0">
+                <a:solidFill>
+                  <a:srgbClr val="1A1A1A"/>
+                </a:solidFill>
+                <a:latin typeface="Arial"/>
+              </a:rPr>
+              <a:t>Stochastic Volatility Inspired parameterization of total variance</a:t>
+            </a:r>
+          </a:p>
+          <a:p>
+            <a:pPr>
+              <a:spcAft>
+                <a:spcPts val="700"/>
+              </a:spcAft>
+            </a:pPr>
+            <a:r>
+              <a:rPr sz="1500" b="1" i="0">
+                <a:solidFill>
+                  <a:srgbClr val="CC0000"/>
+                </a:solidFill>
+                <a:latin typeface="Arial"/>
+              </a:rPr>
+              <a:t>SABR — </a:t>
+            </a:r>
+            <a:r>
+              <a:rPr sz="1500" b="0" i="0">
+                <a:solidFill>
+                  <a:srgbClr val="1A1A1A"/>
+                </a:solidFill>
+                <a:latin typeface="Arial"/>
+              </a:rPr>
+              <a:t>stochastic alpha-beta-rho model with the Hagan implied-vol expansion</a:t>
+            </a:r>
+          </a:p>
+          <a:p>
+            <a:pPr>
+              <a:spcAft>
+                <a:spcPts val="700"/>
+              </a:spcAft>
+            </a:pPr>
+            <a:r>
+              <a:rPr sz="1500" b="1" i="0">
+                <a:solidFill>
+                  <a:srgbClr val="CC0000"/>
+                </a:solidFill>
+                <a:latin typeface="Arial"/>
+              </a:rPr>
+              <a:t>Greeks — </a:t>
+            </a:r>
+            <a:r>
+              <a:rPr sz="1500" b="0" i="0">
+                <a:solidFill>
+                  <a:srgbClr val="1A1A1A"/>
+                </a:solidFill>
+                <a:latin typeface="Arial"/>
+              </a:rPr>
+              <a:t>price sensitivities: delta, gamma, vega, theta, rho</a:t>
+            </a:r>
+          </a:p>
+          <a:p>
+            <a:pPr>
+              <a:spcAft>
+                <a:spcPts val="700"/>
+              </a:spcAft>
+            </a:pPr>
+            <a:r>
+              <a:rPr sz="1500" b="1" i="0">
+                <a:solidFill>
+                  <a:srgbClr val="CC0000"/>
+                </a:solidFill>
+                <a:latin typeface="Arial"/>
+              </a:rPr>
+              <a:t>Vanna / Volga — </a:t>
+            </a:r>
+            <a:r>
+              <a:rPr sz="1500" b="0" i="0">
+                <a:solidFill>
+                  <a:srgbClr val="1A1A1A"/>
+                </a:solidFill>
+                <a:latin typeface="Arial"/>
+              </a:rPr>
+              <a:t>second-order Greeks: d vega / dS and d vega / d sigma</a:t>
+            </a:r>
+          </a:p>
+          <a:p>
+            <a:pPr>
+              <a:spcAft>
+                <a:spcPts val="700"/>
+              </a:spcAft>
+            </a:pPr>
+            <a:r>
+              <a:rPr sz="1500" b="1" i="0">
+                <a:solidFill>
+                  <a:srgbClr val="CC0000"/>
+                </a:solidFill>
+                <a:latin typeface="Arial"/>
+              </a:rPr>
+              <a:t>Calendar / butterfly arbitrage — </a:t>
+            </a:r>
+            <a:r>
+              <a:rPr sz="1500" b="0" i="0">
+                <a:solidFill>
+                  <a:srgbClr val="1A1A1A"/>
+                </a:solidFill>
+                <a:latin typeface="Arial"/>
+              </a:rPr>
+              <a:t>no-arbitrage constraints the surface must satisfy</a:t>
             </a:r>
           </a:p>
         </p:txBody>
@@ -3791,6 +3856,164 @@
                 </a:solidFill>
                 <a:latin typeface="Arial"/>
               </a:rPr>
+              <a:t>Reading</a:t>
+            </a:r>
+          </a:p>
+        </p:txBody>
+      </p:sp>
+      <p:sp>
+        <p:nvSpPr>
+          <p:cNvPr id="4" name="Rectangle 3"/>
+          <p:cNvSpPr/>
+          <p:nvPr/>
+        </p:nvSpPr>
+        <p:spPr>
+          <a:xfrm>
+            <a:off x="457200" y="1371600"/>
+            <a:ext cx="11247120" cy="27940"/>
+          </a:xfrm>
+          <a:prstGeom prst="rect">
+            <a:avLst/>
+          </a:prstGeom>
+          <a:solidFill>
+            <a:srgbClr val="CC0000"/>
+          </a:solidFill>
+          <a:ln>
+            <a:noFill/>
+          </a:ln>
+        </p:spPr>
+        <p:style>
+          <a:lnRef idx="1">
+            <a:schemeClr val="accent1"/>
+          </a:lnRef>
+          <a:fillRef idx="3">
+            <a:schemeClr val="accent1"/>
+          </a:fillRef>
+          <a:effectRef idx="2">
+            <a:schemeClr val="accent1"/>
+          </a:effectRef>
+          <a:fontRef idx="minor">
+            <a:schemeClr val="lt1"/>
+          </a:fontRef>
+        </p:style>
+        <p:txBody>
+          <a:bodyPr rtlCol="0" anchor="ctr"/>
+          <a:lstStyle/>
+          <a:p>
+            <a:pPr algn="ctr"/>
+          </a:p>
+        </p:txBody>
+      </p:sp>
+      <p:sp>
+        <p:nvSpPr>
+          <p:cNvPr id="5" name="TextBox 4"/>
+          <p:cNvSpPr txBox="1"/>
+          <p:nvPr/>
+        </p:nvSpPr>
+        <p:spPr>
+          <a:xfrm>
+            <a:off x="640080" y="1600200"/>
+            <a:ext cx="10972800" cy="4937760"/>
+          </a:xfrm>
+          <a:prstGeom prst="rect">
+            <a:avLst/>
+          </a:prstGeom>
+          <a:noFill/>
+        </p:spPr>
+        <p:txBody>
+          <a:bodyPr wrap="square">
+            <a:spAutoFit/>
+          </a:bodyPr>
+          <a:lstStyle/>
+          <a:p>
+            <a:pPr>
+              <a:spcAft>
+                <a:spcPts val="800"/>
+              </a:spcAft>
+            </a:pPr>
+            <a:r>
+              <a:rPr sz="1700" b="0" i="0">
+                <a:solidFill>
+                  <a:srgbClr val="1A1A1A"/>
+                </a:solidFill>
+                <a:latin typeface="Arial"/>
+              </a:rPr>
+              <a:t>•  Gatheral (2006), Ch. 1-5; Gatheral-Jacquier (2014); Hagan et al. (2002)</a:t>
+            </a:r>
+          </a:p>
+        </p:txBody>
+      </p:sp>
+    </p:spTree>
+  </p:cSld>
+  <p:clrMapOvr>
+    <a:masterClrMapping/>
+  </p:clrMapOvr>
+</p:sld>
+</file>
+
+<file path=ppt/slides/slide13.xml><?xml version="1.0" encoding="utf-8"?>
+<p:sld xmlns:a="http://schemas.openxmlformats.org/drawingml/2006/main" xmlns:p="http://schemas.openxmlformats.org/presentationml/2006/main" xmlns:r="http://schemas.openxmlformats.org/officeDocument/2006/relationships">
+  <p:cSld>
+    <p:spTree>
+      <p:nvGrpSpPr>
+        <p:cNvPr id="1" name=""/>
+        <p:cNvGrpSpPr/>
+        <p:nvPr/>
+      </p:nvGrpSpPr>
+      <p:grpSpPr/>
+      <p:pic>
+        <p:nvPicPr>
+          <p:cNvPr id="2" name="Picture 1" descr="ncsu_logo.png"/>
+          <p:cNvPicPr>
+            <a:picLocks noChangeAspect="1"/>
+          </p:cNvPicPr>
+          <p:nvPr/>
+        </p:nvPicPr>
+        <p:blipFill>
+          <a:blip r:embed="rId2"/>
+          <a:stretch>
+            <a:fillRect/>
+          </a:stretch>
+        </p:blipFill>
+        <p:spPr>
+          <a:xfrm>
+            <a:off x="9784080" y="274320"/>
+            <a:ext cx="2011680" cy="316653"/>
+          </a:xfrm>
+          <a:prstGeom prst="rect">
+            <a:avLst/>
+          </a:prstGeom>
+        </p:spPr>
+      </p:pic>
+      <p:sp>
+        <p:nvSpPr>
+          <p:cNvPr id="3" name="TextBox 2"/>
+          <p:cNvSpPr txBox="1"/>
+          <p:nvPr/>
+        </p:nvSpPr>
+        <p:spPr>
+          <a:xfrm>
+            <a:off x="457200" y="457200"/>
+            <a:ext cx="8961120" cy="822960"/>
+          </a:xfrm>
+          <a:prstGeom prst="rect">
+            <a:avLst/>
+          </a:prstGeom>
+          <a:noFill/>
+        </p:spPr>
+        <p:txBody>
+          <a:bodyPr wrap="square">
+            <a:spAutoFit/>
+          </a:bodyPr>
+          <a:lstStyle/>
+          <a:p>
+            <a:r>
+              <a:rPr sz="2400" b="1" i="0">
+                <a:solidFill>
+                  <a:srgbClr val="990000"/>
+                </a:solidFill>
+                <a:latin typeface="Arial"/>
+              </a:rPr>
               <a:t>References</a:t>
             </a:r>
           </a:p>
@@ -4176,6 +4399,22 @@
                 <a:latin typeface="Arial"/>
               </a:rPr>
               <a:t>•  Code: week6_bs_autograd.py</a:t>
+            </a:r>
+          </a:p>
+          <a:p>
+            <a:pPr>
+              <a:spcAft>
+                <a:spcPts val="500"/>
+              </a:spcAft>
+            </a:pPr>
+            <a:r>
+              <a:rPr sz="1200" b="0" i="0">
+                <a:solidFill>
+                  <a:srgbClr val="1A1A1A"/>
+                </a:solidFill>
+                <a:latin typeface="Arial"/>
+              </a:rPr>
+              <a:t>•  Summary &amp; key takeaways</a:t>
             </a:r>
           </a:p>
           <a:p>
